--- a/docs/260904_AEC FPCA 및 1D CNN 결과 비교.pptx
+++ b/docs/260904_AEC FPCA 및 1D CNN 결과 비교.pptx
@@ -25,11 +25,11 @@
   <p:notesSz cx="6858000" cy="9144000"/>
   <p:embeddedFontLst>
     <p:embeddedFont>
-      <p:font typeface="KoPub돋움체 Bold" panose="00000800000000000000" pitchFamily="2" charset="-127"/>
+      <p:font typeface="KoPub돋움체 Bold" panose="020B0600000101010101" charset="-127"/>
       <p:bold r:id="rId15"/>
     </p:embeddedFont>
     <p:embeddedFont>
-      <p:font typeface="KoPub돋움체 Medium" panose="00000600000000000000" pitchFamily="2" charset="-127"/>
+      <p:font typeface="KoPub돋움체 Medium" panose="020B0600000101010101" charset="-127"/>
       <p:regular r:id="rId16"/>
     </p:embeddedFont>
   </p:embeddedFontLst>
@@ -176,7 +176,7 @@
   <pc:docChgLst>
     <pc:chgData name="janghoon jun" userId="056a5883350c2f5e" providerId="LiveId" clId="{6DA654A6-03B0-40F7-A259-B276216985A6}"/>
     <pc:docChg chg="undo redo custSel addSld delSld modSld sldOrd modSection">
-      <pc:chgData name="janghoon jun" userId="056a5883350c2f5e" providerId="LiveId" clId="{6DA654A6-03B0-40F7-A259-B276216985A6}" dt="2026-09-03T11:53:09.849" v="4324" actId="1076"/>
+      <pc:chgData name="janghoon jun" userId="056a5883350c2f5e" providerId="LiveId" clId="{6DA654A6-03B0-40F7-A259-B276216985A6}" dt="2026-09-04T03:41:23.035" v="4338" actId="14100"/>
       <pc:docMkLst>
         <pc:docMk/>
       </pc:docMkLst>
@@ -225,36 +225,6 @@
             <ac:spMk id="12" creationId="{FB6B5539-CC2D-F932-DAA3-12E2A40E7236}"/>
           </ac:spMkLst>
         </pc:spChg>
-        <pc:grpChg chg="add del mod">
-          <ac:chgData name="janghoon jun" userId="056a5883350c2f5e" providerId="LiveId" clId="{6DA654A6-03B0-40F7-A259-B276216985A6}" dt="2026-09-02T02:37:40.171" v="3725" actId="478"/>
-          <ac:grpSpMkLst>
-            <pc:docMk/>
-            <pc:sldMk cId="0" sldId="257"/>
-            <ac:grpSpMk id="11" creationId="{1FA019A3-0AB6-2C56-8302-ED956B7043E1}"/>
-          </ac:grpSpMkLst>
-        </pc:grpChg>
-        <pc:picChg chg="add del mod modCrop">
-          <ac:chgData name="janghoon jun" userId="056a5883350c2f5e" providerId="LiveId" clId="{6DA654A6-03B0-40F7-A259-B276216985A6}" dt="2026-09-02T02:37:41.017" v="3726" actId="478"/>
-          <ac:picMkLst>
-            <pc:docMk/>
-            <pc:sldMk cId="0" sldId="257"/>
-            <ac:picMk id="3" creationId="{23CAF732-A9F9-BCFC-439A-A342776582FF}"/>
-          </ac:picMkLst>
-        </pc:picChg>
-      </pc:sldChg>
-      <pc:sldChg chg="add del modNotes">
-        <pc:chgData name="janghoon jun" userId="056a5883350c2f5e" providerId="LiveId" clId="{6DA654A6-03B0-40F7-A259-B276216985A6}" dt="2026-09-02T02:37:52.972" v="3735" actId="47"/>
-        <pc:sldMkLst>
-          <pc:docMk/>
-          <pc:sldMk cId="1147349972" sldId="262"/>
-        </pc:sldMkLst>
-      </pc:sldChg>
-      <pc:sldChg chg="modSp add del mod modNotes">
-        <pc:chgData name="janghoon jun" userId="056a5883350c2f5e" providerId="LiveId" clId="{6DA654A6-03B0-40F7-A259-B276216985A6}" dt="2026-09-02T02:37:51.142" v="3732" actId="47"/>
-        <pc:sldMkLst>
-          <pc:docMk/>
-          <pc:sldMk cId="845412182" sldId="263"/>
-        </pc:sldMkLst>
       </pc:sldChg>
       <pc:sldChg chg="add modNotes">
         <pc:chgData name="janghoon jun" userId="056a5883350c2f5e" providerId="LiveId" clId="{6DA654A6-03B0-40F7-A259-B276216985A6}" dt="2026-09-02T02:37:32.227" v="3724" actId="368"/>
@@ -592,13 +562,6 @@
           <pc:sldMk cId="0" sldId="493"/>
         </pc:sldMkLst>
       </pc:sldChg>
-      <pc:sldChg chg="addSp delSp modSp add del mod modNotes modNotesTx">
-        <pc:chgData name="janghoon jun" userId="056a5883350c2f5e" providerId="LiveId" clId="{6DA654A6-03B0-40F7-A259-B276216985A6}" dt="2026-09-02T02:37:49.796" v="3729" actId="47"/>
-        <pc:sldMkLst>
-          <pc:docMk/>
-          <pc:sldMk cId="1069001619" sldId="493"/>
-        </pc:sldMkLst>
-      </pc:sldChg>
       <pc:sldChg chg="addSp delSp modSp add del mod modNotesTx">
         <pc:chgData name="janghoon jun" userId="056a5883350c2f5e" providerId="LiveId" clId="{6DA654A6-03B0-40F7-A259-B276216985A6}" dt="2026-09-03T11:03:09.317" v="4223" actId="47"/>
         <pc:sldMkLst>
@@ -872,7 +835,7 @@
         </pc:picChg>
       </pc:sldChg>
       <pc:sldChg chg="addSp delSp modSp add mod">
-        <pc:chgData name="janghoon jun" userId="056a5883350c2f5e" providerId="LiveId" clId="{6DA654A6-03B0-40F7-A259-B276216985A6}" dt="2026-09-03T11:53:09.849" v="4324" actId="1076"/>
+        <pc:chgData name="janghoon jun" userId="056a5883350c2f5e" providerId="LiveId" clId="{6DA654A6-03B0-40F7-A259-B276216985A6}" dt="2026-09-04T03:40:55.852" v="4336" actId="1036"/>
         <pc:sldMkLst>
           <pc:docMk/>
           <pc:sldMk cId="3820420432" sldId="499"/>
@@ -966,7 +929,7 @@
           </ac:grpSpMkLst>
         </pc:grpChg>
         <pc:picChg chg="add mod">
-          <ac:chgData name="janghoon jun" userId="056a5883350c2f5e" providerId="LiveId" clId="{6DA654A6-03B0-40F7-A259-B276216985A6}" dt="2026-09-03T11:53:09.849" v="4324" actId="1076"/>
+          <ac:chgData name="janghoon jun" userId="056a5883350c2f5e" providerId="LiveId" clId="{6DA654A6-03B0-40F7-A259-B276216985A6}" dt="2026-09-04T03:40:55.852" v="4336" actId="1036"/>
           <ac:picMkLst>
             <pc:docMk/>
             <pc:sldMk cId="3820420432" sldId="499"/>
@@ -1022,7 +985,7 @@
         </pc:sldMkLst>
       </pc:sldChg>
       <pc:sldChg chg="modSp add mod">
-        <pc:chgData name="janghoon jun" userId="056a5883350c2f5e" providerId="LiveId" clId="{6DA654A6-03B0-40F7-A259-B276216985A6}" dt="2026-09-03T11:01:56.044" v="4210" actId="20577"/>
+        <pc:chgData name="janghoon jun" userId="056a5883350c2f5e" providerId="LiveId" clId="{6DA654A6-03B0-40F7-A259-B276216985A6}" dt="2026-09-04T03:41:23.035" v="4338" actId="14100"/>
         <pc:sldMkLst>
           <pc:docMk/>
           <pc:sldMk cId="4128333669" sldId="500"/>
@@ -1033,6 +996,14 @@
             <pc:docMk/>
             <pc:sldMk cId="4128333669" sldId="500"/>
             <ac:spMk id="4" creationId="{5711BA0B-CE4F-3235-D7F6-E7508AFAE47E}"/>
+          </ac:spMkLst>
+        </pc:spChg>
+        <pc:spChg chg="mod">
+          <ac:chgData name="janghoon jun" userId="056a5883350c2f5e" providerId="LiveId" clId="{6DA654A6-03B0-40F7-A259-B276216985A6}" dt="2026-09-04T03:41:23.035" v="4338" actId="14100"/>
+          <ac:spMkLst>
+            <pc:docMk/>
+            <pc:sldMk cId="4128333669" sldId="500"/>
+            <ac:spMk id="6" creationId="{00000000-0000-0000-0000-000000000000}"/>
           </ac:spMkLst>
         </pc:spChg>
       </pc:sldChg>
@@ -1203,7 +1174,7 @@
             <a:fld id="{33074436-1BEA-4F09-AD5C-9DF87C96BF5A}" type="datetimeFigureOut">
               <a:rPr lang="ko-KR" altLang="en-US" smtClean="0"/>
               <a:pPr/>
-              <a:t>2026-09-03</a:t>
+              <a:t>2026-09-04</a:t>
             </a:fld>
             <a:endParaRPr lang="ko-KR" altLang="en-US" dirty="0"/>
           </a:p>
@@ -1527,7 +1498,7 @@
           <a:bodyPr/>
           <a:lstStyle/>
           <a:p>
-            <a:endParaRPr/>
+            <a:endParaRPr dirty="0"/>
           </a:p>
         </p:txBody>
       </p:sp>
@@ -1878,7 +1849,11 @@
           <a:bodyPr/>
           <a:lstStyle/>
           <a:p>
-            <a:endParaRPr/>
+            <a:r>
+              <a:rPr lang="en-US" dirty="0"/>
+              <a:t>Fu</a:t>
+            </a:r>
+            <a:endParaRPr dirty="0"/>
           </a:p>
         </p:txBody>
       </p:sp>
@@ -2061,7 +2036,7 @@
           <a:bodyPr/>
           <a:lstStyle/>
           <a:p>
-            <a:endParaRPr/>
+            <a:endParaRPr dirty="0"/>
           </a:p>
         </p:txBody>
       </p:sp>
@@ -2382,7 +2357,15 @@
           <a:bodyPr/>
           <a:lstStyle/>
           <a:p>
-            <a:endParaRPr/>
+            <a:r>
+              <a:rPr lang="en-US" dirty="0"/>
+              <a:t>Fusion</a:t>
+            </a:r>
+            <a:r>
+              <a:rPr lang="ko-KR" altLang="en-US" dirty="0"/>
+              <a:t>에 대한 차이점 자세하게 확인 요망</a:t>
+            </a:r>
+            <a:endParaRPr dirty="0"/>
           </a:p>
         </p:txBody>
       </p:sp>
@@ -2479,7 +2462,30 @@
           <a:bodyPr/>
           <a:lstStyle/>
           <a:p>
-            <a:endParaRPr/>
+            <a:r>
+              <a:rPr lang="en-US" dirty="0"/>
+              <a:t>LSTM </a:t>
+            </a:r>
+            <a:r>
+              <a:rPr lang="ko-KR" altLang="en-US" dirty="0"/>
+              <a:t>방법</a:t>
+            </a:r>
+            <a:endParaRPr lang="en-US" altLang="ko-KR" dirty="0"/>
+          </a:p>
+          <a:p>
+            <a:r>
+              <a:rPr lang="en-US" dirty="0"/>
+              <a:t>Clinic</a:t>
+            </a:r>
+            <a:r>
+              <a:rPr lang="ko-KR" altLang="en-US" dirty="0"/>
+              <a:t>에서 가중치를 확인해볼 </a:t>
+            </a:r>
+            <a:r>
+              <a:rPr lang="ko-KR" altLang="en-US" dirty="0" err="1"/>
+              <a:t>필요있음</a:t>
+            </a:r>
+            <a:endParaRPr dirty="0"/>
           </a:p>
         </p:txBody>
       </p:sp>
@@ -6227,7 +6233,6 @@
           </a:bodyPr>
           <a:lstStyle/>
           <a:p>
-            <a:pPr/>
             <a:r>
               <a:rPr sz="1500"/>
               <a:t>Clinic4 vs AEC(FPCA) vs AEC(1D CNN, Intermediate Fusion) vs AEC(1D CNN, Late Fusion) 4-way 비교</a:t>
@@ -6280,8 +6285,8 @@
         </p:nvSpPr>
         <p:spPr>
           <a:xfrm>
-            <a:off x="508000" y="5890000"/>
-            <a:ext cx="11176000" cy="480000"/>
+            <a:off x="508000" y="5830000"/>
+            <a:ext cx="11061148" cy="646331"/>
           </a:xfrm>
           <a:prstGeom prst="rect">
             <a:avLst/>
@@ -6295,15 +6300,204 @@
           <a:lstStyle/>
           <a:p>
             <a:r>
-              <a:rPr sz="1200" i="1"/>
-              <a:t>DeLong, Late Fusion 기준: vs clinic4 6/6 n.s.(추가이득 없음) · vs FPCA 3/6 유의 열세(HTN internal p=0.0003, HTN external p=0.024, DM external p=0.009)</a:t>
-            </a:r>
-          </a:p>
-          <a:p>
-            <a:r>
-              <a:rPr sz="1200" i="1"/>
-              <a:t>vs Intermediate Fusion(CNN concat): HTN 2/2 유의 열세, 반대로 DM·CKD external은 유의 우세(p=0.016/0.023) — 결정단계 결합이 항상 나쁜 것도 아니지만 질환별로 방향이 뒤집혀 일관성 없음</a:t>
-            </a:r>
+              <a:rPr sz="1200" i="1" dirty="0"/>
+              <a:t>DeLong, Late Fusion </a:t>
+            </a:r>
+            <a:r>
+              <a:rPr sz="1200" i="1" dirty="0" err="1"/>
+              <a:t>기준</a:t>
+            </a:r>
+            <a:r>
+              <a:rPr sz="1200" i="1" dirty="0"/>
+              <a:t>: vs clinic4 6/6 </a:t>
+            </a:r>
+            <a:r>
+              <a:rPr sz="1200" i="1" dirty="0" err="1"/>
+              <a:t>n.s</a:t>
+            </a:r>
+            <a:r>
+              <a:rPr sz="1200" i="1" dirty="0"/>
+              <a:t>.(</a:t>
+            </a:r>
+            <a:r>
+              <a:rPr sz="1200" i="1" dirty="0" err="1"/>
+              <a:t>추가이득</a:t>
+            </a:r>
+            <a:r>
+              <a:rPr sz="1200" i="1" dirty="0"/>
+              <a:t> </a:t>
+            </a:r>
+            <a:r>
+              <a:rPr sz="1200" i="1" dirty="0" err="1"/>
+              <a:t>없음</a:t>
+            </a:r>
+            <a:r>
+              <a:rPr sz="1200" i="1" dirty="0"/>
+              <a:t>) · vs FPCA 3/6 </a:t>
+            </a:r>
+            <a:r>
+              <a:rPr sz="1200" i="1" dirty="0" err="1"/>
+              <a:t>유의</a:t>
+            </a:r>
+            <a:r>
+              <a:rPr sz="1200" i="1" dirty="0"/>
+              <a:t> </a:t>
+            </a:r>
+            <a:r>
+              <a:rPr sz="1200" i="1" dirty="0" err="1"/>
+              <a:t>열세</a:t>
+            </a:r>
+            <a:r>
+              <a:rPr sz="1200" i="1" dirty="0"/>
+              <a:t>(HTN internal p=0.0003, HTN external p=0.024, DM external p=0.009)</a:t>
+            </a:r>
+          </a:p>
+          <a:p>
+            <a:r>
+              <a:rPr sz="1200" i="1" dirty="0"/>
+              <a:t>vs Intermediate Fusion(CNN </a:t>
+            </a:r>
+            <a:r>
+              <a:rPr sz="1200" i="1" dirty="0" err="1"/>
+              <a:t>concat</a:t>
+            </a:r>
+            <a:r>
+              <a:rPr sz="1200" i="1" dirty="0"/>
+              <a:t>): HTN 2/2 </a:t>
+            </a:r>
+            <a:r>
+              <a:rPr sz="1200" i="1" dirty="0" err="1"/>
+              <a:t>유의</a:t>
+            </a:r>
+            <a:r>
+              <a:rPr sz="1200" i="1" dirty="0"/>
+              <a:t> </a:t>
+            </a:r>
+            <a:r>
+              <a:rPr sz="1200" i="1" dirty="0" err="1"/>
+              <a:t>열세</a:t>
+            </a:r>
+            <a:r>
+              <a:rPr sz="1200" i="1" dirty="0"/>
+              <a:t>, </a:t>
+            </a:r>
+            <a:r>
+              <a:rPr sz="1200" i="1" dirty="0" err="1"/>
+              <a:t>반대로</a:t>
+            </a:r>
+            <a:r>
+              <a:rPr sz="1200" i="1" dirty="0"/>
+              <a:t> DM·CKD </a:t>
+            </a:r>
+            <a:r>
+              <a:rPr sz="1200" i="1" dirty="0" err="1"/>
+              <a:t>external은</a:t>
+            </a:r>
+            <a:r>
+              <a:rPr sz="1200" i="1" dirty="0"/>
+              <a:t> </a:t>
+            </a:r>
+            <a:r>
+              <a:rPr sz="1200" i="1" dirty="0" err="1"/>
+              <a:t>유의</a:t>
+            </a:r>
+            <a:r>
+              <a:rPr sz="1200" i="1" dirty="0"/>
+              <a:t> </a:t>
+            </a:r>
+            <a:r>
+              <a:rPr sz="1200" i="1" dirty="0" err="1"/>
+              <a:t>우세</a:t>
+            </a:r>
+            <a:r>
+              <a:rPr sz="1200" i="1" dirty="0"/>
+              <a:t>(p=0.016/0.023) — </a:t>
+            </a:r>
+            <a:r>
+              <a:rPr sz="1200" i="1" dirty="0" err="1"/>
+              <a:t>결정단계</a:t>
+            </a:r>
+            <a:r>
+              <a:rPr sz="1200" i="1" dirty="0"/>
+              <a:t> </a:t>
+            </a:r>
+            <a:r>
+              <a:rPr sz="1200" i="1" dirty="0" err="1"/>
+              <a:t>결합이</a:t>
+            </a:r>
+            <a:r>
+              <a:rPr sz="1200" i="1" dirty="0"/>
+              <a:t> </a:t>
+            </a:r>
+            <a:r>
+              <a:rPr sz="1200" i="1" dirty="0" err="1"/>
+              <a:t>항상</a:t>
+            </a:r>
+            <a:r>
+              <a:rPr sz="1200" i="1" dirty="0"/>
+              <a:t> </a:t>
+            </a:r>
+            <a:r>
+              <a:rPr sz="1200" i="1" dirty="0" err="1"/>
+              <a:t>나쁜</a:t>
+            </a:r>
+            <a:r>
+              <a:rPr sz="1200" i="1" dirty="0"/>
+              <a:t> </a:t>
+            </a:r>
+            <a:r>
+              <a:rPr sz="1200" i="1" dirty="0" err="1"/>
+              <a:t>것도</a:t>
+            </a:r>
+            <a:r>
+              <a:rPr sz="1200" i="1" dirty="0"/>
+              <a:t> </a:t>
+            </a:r>
+            <a:r>
+              <a:rPr sz="1200" i="1" dirty="0" err="1"/>
+              <a:t>아니지만</a:t>
+            </a:r>
+            <a:r>
+              <a:rPr sz="1200" i="1" dirty="0"/>
+              <a:t> </a:t>
+            </a:r>
+            <a:r>
+              <a:rPr sz="1200" i="1" dirty="0" err="1"/>
+              <a:t>질환별로</a:t>
+            </a:r>
+            <a:r>
+              <a:rPr sz="1200" i="1" dirty="0"/>
+              <a:t> </a:t>
+            </a:r>
+            <a:r>
+              <a:rPr sz="1200" i="1" dirty="0" err="1"/>
+              <a:t>방향이</a:t>
+            </a:r>
+            <a:r>
+              <a:rPr sz="1200" i="1" dirty="0"/>
+              <a:t> </a:t>
+            </a:r>
+            <a:r>
+              <a:rPr sz="1200" i="1" dirty="0" err="1"/>
+              <a:t>뒤집혀</a:t>
+            </a:r>
+            <a:r>
+              <a:rPr sz="1200" i="1" dirty="0"/>
+              <a:t> </a:t>
+            </a:r>
+            <a:r>
+              <a:rPr sz="1200" i="1" dirty="0" err="1"/>
+              <a:t>일관성</a:t>
+            </a:r>
+            <a:r>
+              <a:rPr sz="1200" i="1" dirty="0"/>
+              <a:t> </a:t>
+            </a:r>
+            <a:r>
+              <a:rPr sz="1200" i="1" dirty="0" err="1"/>
+              <a:t>없음</a:t>
+            </a:r>
+            <a:endParaRPr sz="1200" i="1" dirty="0"/>
           </a:p>
         </p:txBody>
       </p:sp>
@@ -6316,7 +6510,7 @@
           <p:nvPr/>
         </p:nvPicPr>
         <p:blipFill>
-          <a:blip r:embed="rId4"/>
+          <a:blip r:embed="rId3"/>
           <a:stretch>
             <a:fillRect/>
           </a:stretch>
@@ -6410,7 +6604,6 @@
           <a:bodyPr/>
           <a:lstStyle/>
           <a:p>
-            <a:pPr/>
             <a:r>
               <a:rPr sz="2000" b="1"/>
               <a:t>Conclusion</a:t>
@@ -6445,7 +6638,6 @@
             </a:r>
           </a:p>
           <a:p>
-            <a:pPr/>
             <a:r>
               <a:rPr sz="2000" b="1"/>
               <a:t>Next Plans</a:t>
@@ -7991,25 +8183,267 @@
           </a:bodyPr>
           <a:lstStyle/>
           <a:p>
-            <a:pPr/>
-            <a:r>
-              <a:rPr sz="1800" b="1"/>
-              <a:t>Alipour et al., Radiology Advances 2025 (umaf035) — XComposition 아키텍처</a:t>
-            </a:r>
+            <a:r>
+              <a:rPr sz="1800" b="1" dirty="0"/>
+              <a:t>Alipour et al., Radiology Advances 2025 (umaf035) — </a:t>
+            </a:r>
+            <a:r>
+              <a:rPr sz="1800" b="1" dirty="0" err="1"/>
+              <a:t>XComposition</a:t>
+            </a:r>
+            <a:r>
+              <a:rPr sz="1800" b="1" dirty="0"/>
+              <a:t> </a:t>
+            </a:r>
+            <a:r>
+              <a:rPr sz="1800" b="1" dirty="0" err="1"/>
+              <a:t>아키텍처</a:t>
+            </a:r>
+            <a:endParaRPr sz="1800" b="1" dirty="0"/>
           </a:p>
           <a:p>
             <a:pPr lvl="1"/>
             <a:r>
-              <a:rPr sz="1400"/>
-              <a:t>흉부 X-ray → CNN 인코더(Flatten) + 임상변수(Age/Sex/Weight/Height) → Early/Intermediate/Late Fusion 비교 → Dense → 체성분(골격근/VAT/SAT/척추골 volume) 예측</a:t>
-            </a:r>
+              <a:rPr sz="1400" dirty="0" err="1"/>
+              <a:t>흉부</a:t>
+            </a:r>
+            <a:r>
+              <a:rPr sz="1400" dirty="0"/>
+              <a:t> X-ray → CNN </a:t>
+            </a:r>
+            <a:r>
+              <a:rPr sz="1400" dirty="0" err="1"/>
+              <a:t>인코더</a:t>
+            </a:r>
+            <a:r>
+              <a:rPr sz="1400" dirty="0"/>
+              <a:t>(Flatten) + </a:t>
+            </a:r>
+            <a:r>
+              <a:rPr sz="1400" dirty="0" err="1"/>
+              <a:t>임상변수</a:t>
+            </a:r>
+            <a:r>
+              <a:rPr sz="1400" dirty="0"/>
+              <a:t>(Age/Sex/Weight/Height) → Early/Intermediate/Late Fusion </a:t>
+            </a:r>
+            <a:r>
+              <a:rPr sz="1400" dirty="0" err="1"/>
+              <a:t>비교</a:t>
+            </a:r>
+            <a:r>
+              <a:rPr sz="1400" dirty="0"/>
+              <a:t> → Dense → </a:t>
+            </a:r>
+            <a:r>
+              <a:rPr sz="1400" dirty="0" err="1"/>
+              <a:t>체성분</a:t>
+            </a:r>
+            <a:r>
+              <a:rPr sz="1400" dirty="0"/>
+              <a:t>(</a:t>
+            </a:r>
+            <a:r>
+              <a:rPr sz="1400" dirty="0" err="1"/>
+              <a:t>골격근</a:t>
+            </a:r>
+            <a:r>
+              <a:rPr sz="1400" dirty="0"/>
+              <a:t>/VAT/SAT/</a:t>
+            </a:r>
+            <a:r>
+              <a:rPr sz="1400" dirty="0" err="1"/>
+              <a:t>척추골</a:t>
+            </a:r>
+            <a:r>
+              <a:rPr sz="1400" dirty="0"/>
+              <a:t> volume) </a:t>
+            </a:r>
+            <a:r>
+              <a:rPr sz="1400" dirty="0" err="1"/>
+              <a:t>예측</a:t>
+            </a:r>
+            <a:endParaRPr sz="1400" dirty="0"/>
           </a:p>
           <a:p>
             <a:pPr lvl="1"/>
             <a:r>
-              <a:rPr sz="1400"/>
-              <a:t>본 연구 구조(AEC curve encoder + clinic encoder 각각 임베딩 → concat(32) → 공유 Fusion Head, 슬라이드 9)는 이 분류 체계상 Intermediate Fusion에 해당 — Late Fusion(모달리티별 독립 예측 후 결합)이 아니라, 특징벡터 단계에서 결합 후 공유 head로 처리</a:t>
-            </a:r>
+              <a:rPr sz="1400" dirty="0"/>
+              <a:t>본 </a:t>
+            </a:r>
+            <a:r>
+              <a:rPr sz="1400" dirty="0" err="1"/>
+              <a:t>연구</a:t>
+            </a:r>
+            <a:r>
+              <a:rPr sz="1400" dirty="0"/>
+              <a:t> </a:t>
+            </a:r>
+            <a:r>
+              <a:rPr sz="1400" dirty="0" err="1"/>
+              <a:t>구조</a:t>
+            </a:r>
+            <a:r>
+              <a:rPr sz="1400" dirty="0"/>
+              <a:t>(AEC curve encoder + clinic encoder </a:t>
+            </a:r>
+            <a:r>
+              <a:rPr sz="1400" dirty="0" err="1"/>
+              <a:t>각각</a:t>
+            </a:r>
+            <a:r>
+              <a:rPr sz="1400" dirty="0"/>
+              <a:t> </a:t>
+            </a:r>
+            <a:r>
+              <a:rPr sz="1400" dirty="0" err="1"/>
+              <a:t>임베딩</a:t>
+            </a:r>
+            <a:r>
+              <a:rPr sz="1400" dirty="0"/>
+              <a:t> → </a:t>
+            </a:r>
+            <a:r>
+              <a:rPr sz="1400" dirty="0" err="1"/>
+              <a:t>concat</a:t>
+            </a:r>
+            <a:r>
+              <a:rPr sz="1400" dirty="0"/>
+              <a:t>(32) → </a:t>
+            </a:r>
+            <a:r>
+              <a:rPr sz="1400" dirty="0" err="1"/>
+              <a:t>공유</a:t>
+            </a:r>
+            <a:r>
+              <a:rPr sz="1400" dirty="0"/>
+              <a:t> Fusion Head, </a:t>
+            </a:r>
+            <a:r>
+              <a:rPr sz="1400" dirty="0" err="1"/>
+              <a:t>슬라이드</a:t>
+            </a:r>
+            <a:r>
+              <a:rPr sz="1400" dirty="0"/>
+              <a:t> 9)는 이 </a:t>
+            </a:r>
+            <a:r>
+              <a:rPr sz="1400" dirty="0" err="1"/>
+              <a:t>분류</a:t>
+            </a:r>
+            <a:r>
+              <a:rPr sz="1400" dirty="0"/>
+              <a:t> </a:t>
+            </a:r>
+            <a:r>
+              <a:rPr sz="1400" dirty="0" err="1"/>
+              <a:t>체계상</a:t>
+            </a:r>
+            <a:r>
+              <a:rPr sz="1400" dirty="0"/>
+              <a:t> Intermediate </a:t>
+            </a:r>
+            <a:r>
+              <a:rPr sz="1400" dirty="0" err="1"/>
+              <a:t>Fusion에</a:t>
+            </a:r>
+            <a:r>
+              <a:rPr sz="1400" dirty="0"/>
+              <a:t> </a:t>
+            </a:r>
+            <a:r>
+              <a:rPr sz="1400" dirty="0" err="1"/>
+              <a:t>해당</a:t>
+            </a:r>
+            <a:r>
+              <a:rPr sz="1400" dirty="0"/>
+              <a:t> — Late Fusion(</a:t>
+            </a:r>
+            <a:r>
+              <a:rPr sz="1400" dirty="0" err="1"/>
+              <a:t>모달리티별</a:t>
+            </a:r>
+            <a:r>
+              <a:rPr sz="1400" dirty="0"/>
+              <a:t> </a:t>
+            </a:r>
+            <a:r>
+              <a:rPr sz="1400" dirty="0" err="1"/>
+              <a:t>독립</a:t>
+            </a:r>
+            <a:r>
+              <a:rPr sz="1400" dirty="0"/>
+              <a:t> </a:t>
+            </a:r>
+            <a:r>
+              <a:rPr sz="1400" dirty="0" err="1"/>
+              <a:t>예측</a:t>
+            </a:r>
+            <a:r>
+              <a:rPr sz="1400" dirty="0"/>
+              <a:t> 후 </a:t>
+            </a:r>
+            <a:r>
+              <a:rPr sz="1400" dirty="0" err="1"/>
+              <a:t>결합</a:t>
+            </a:r>
+            <a:r>
+              <a:rPr sz="1400" dirty="0"/>
+              <a:t>)이 </a:t>
+            </a:r>
+            <a:r>
+              <a:rPr sz="1400" dirty="0" err="1"/>
+              <a:t>아니라</a:t>
+            </a:r>
+            <a:r>
+              <a:rPr sz="1400" dirty="0"/>
+              <a:t>, </a:t>
+            </a:r>
+            <a:r>
+              <a:rPr sz="1400" dirty="0" err="1"/>
+              <a:t>특징벡터</a:t>
+            </a:r>
+            <a:r>
+              <a:rPr sz="1400" dirty="0"/>
+              <a:t> </a:t>
+            </a:r>
+            <a:r>
+              <a:rPr sz="1400" dirty="0" err="1"/>
+              <a:t>단계에서</a:t>
+            </a:r>
+            <a:r>
+              <a:rPr sz="1400" dirty="0"/>
+              <a:t> </a:t>
+            </a:r>
+            <a:r>
+              <a:rPr sz="1400" dirty="0" err="1"/>
+              <a:t>결합</a:t>
+            </a:r>
+            <a:r>
+              <a:rPr sz="1400" dirty="0"/>
+              <a:t> 후 </a:t>
+            </a:r>
+            <a:r>
+              <a:rPr sz="1400" dirty="0" err="1"/>
+              <a:t>공유</a:t>
+            </a:r>
+            <a:r>
+              <a:rPr sz="1400" dirty="0"/>
+              <a:t> </a:t>
+            </a:r>
+            <a:r>
+              <a:rPr sz="1400" dirty="0" err="1"/>
+              <a:t>head로</a:t>
+            </a:r>
+            <a:r>
+              <a:rPr sz="1400" dirty="0"/>
+              <a:t> </a:t>
+            </a:r>
+            <a:r>
+              <a:rPr sz="1400" dirty="0" err="1"/>
+              <a:t>처리</a:t>
+            </a:r>
+            <a:endParaRPr sz="1400" dirty="0"/>
           </a:p>
         </p:txBody>
       </p:sp>
@@ -8065,8 +8499,8 @@
         </p:blipFill>
         <p:spPr>
           <a:xfrm>
-            <a:off x="1190948" y="1645654"/>
-            <a:ext cx="9810104" cy="4603203"/>
+            <a:off x="2477282" y="2962159"/>
+            <a:ext cx="7237435" cy="3396027"/>
           </a:xfrm>
           <a:prstGeom prst="rect">
             <a:avLst/>
